--- a/output_pptx/O_Come_All_Ye_Faithful.pptx
+++ b/output_pptx/O_Come_All_Ye_Faithful.pptx
@@ -3115,8 +3115,8 @@
         </p:nvSpPr>
         <p:spPr>
           <a:xfrm>
-            <a:off x="594360" y="1837944"/>
-            <a:ext cx="11002975" cy="685800"/>
+            <a:off x="640080" y="1650492"/>
+            <a:ext cx="10911535" cy="731520"/>
           </a:xfrm>
           <a:prstGeom prst="rect">
             <a:avLst/>
@@ -3131,7 +3131,7 @@
           <a:p>
             <a:pPr algn="ctr"/>
             <a:r>
-              <a:rPr sz="4400" b="1" i="0">
+              <a:rPr sz="4800" b="1" i="0">
                 <a:solidFill>
                   <a:srgbClr val="FFFFFF"/>
                 </a:solidFill>
@@ -3150,8 +3150,8 @@
         </p:nvSpPr>
         <p:spPr>
           <a:xfrm>
-            <a:off x="594360" y="2560320"/>
-            <a:ext cx="11002975" cy="384048"/>
+            <a:off x="640080" y="2418588"/>
+            <a:ext cx="10911535" cy="365760"/>
           </a:xfrm>
           <a:prstGeom prst="rect">
             <a:avLst/>
@@ -3168,7 +3168,7 @@
             <a:r>
               <a:rPr sz="2400" b="0" i="1">
                 <a:solidFill>
-                  <a:srgbClr val="B4B4B4"/>
+                  <a:srgbClr val="AAAAAA"/>
                 </a:solidFill>
                 <a:latin typeface="Arial"/>
               </a:rPr>
@@ -3185,8 +3185,8 @@
         </p:nvSpPr>
         <p:spPr>
           <a:xfrm>
-            <a:off x="594360" y="2980944"/>
-            <a:ext cx="11002975" cy="347472"/>
+            <a:off x="640080" y="2985516"/>
+            <a:ext cx="10911535" cy="731520"/>
           </a:xfrm>
           <a:prstGeom prst="rect">
             <a:avLst/>
@@ -3201,13 +3201,13 @@
           <a:p>
             <a:pPr algn="ctr"/>
             <a:r>
-              <a:rPr sz="2000" b="0" i="1">
-                <a:solidFill>
-                  <a:srgbClr val="8C8C8C"/>
+              <a:rPr sz="4800" b="1" i="0">
+                <a:solidFill>
+                  <a:srgbClr val="FFFFFF"/>
                 </a:solidFill>
                 <a:latin typeface="Arial"/>
               </a:rPr>
-              <a:t/>
+              <a:t>ベツレヘムに    生ま-れ-たもう</a:t>
             </a:r>
           </a:p>
         </p:txBody>
@@ -3220,8 +3220,8 @@
         </p:nvSpPr>
         <p:spPr>
           <a:xfrm>
-            <a:off x="594360" y="3529584"/>
-            <a:ext cx="11002975" cy="685800"/>
+            <a:off x="640080" y="3753612"/>
+            <a:ext cx="10911535" cy="365760"/>
           </a:xfrm>
           <a:prstGeom prst="rect">
             <a:avLst/>
@@ -3236,13 +3236,13 @@
           <a:p>
             <a:pPr algn="ctr"/>
             <a:r>
-              <a:rPr sz="4400" b="1" i="0">
-                <a:solidFill>
-                  <a:srgbClr val="FFFFFF"/>
+              <a:rPr sz="2400" b="0" i="1">
+                <a:solidFill>
+                  <a:srgbClr val="AAAAAA"/>
                 </a:solidFill>
                 <a:latin typeface="Arial"/>
               </a:rPr>
-              <a:t>ベツレヘムに    生ま-れ-たもう</a:t>
+              <a:t>betsurehemu ni umaretamou</a:t>
             </a:r>
           </a:p>
         </p:txBody>
@@ -3255,8 +3255,8 @@
         </p:nvSpPr>
         <p:spPr>
           <a:xfrm>
-            <a:off x="594360" y="4251960"/>
-            <a:ext cx="11002975" cy="384048"/>
+            <a:off x="640080" y="4530852"/>
+            <a:ext cx="10911535" cy="310896"/>
           </a:xfrm>
           <a:prstGeom prst="rect">
             <a:avLst/>
@@ -3271,13 +3271,13 @@
           <a:p>
             <a:pPr algn="ctr"/>
             <a:r>
-              <a:rPr sz="2400" b="0" i="1">
-                <a:solidFill>
-                  <a:srgbClr val="B4B4B4"/>
+              <a:rPr sz="2000" b="0" i="1">
+                <a:solidFill>
+                  <a:srgbClr val="828282"/>
                 </a:solidFill>
                 <a:latin typeface="Arial"/>
               </a:rPr>
-              <a:t>betsurehemu ni umaretamou</a:t>
+              <a:t>Cristãos, vinde todos, com alegres cantos.</a:t>
             </a:r>
           </a:p>
         </p:txBody>
@@ -3290,8 +3290,8 @@
         </p:nvSpPr>
         <p:spPr>
           <a:xfrm>
-            <a:off x="594360" y="4672584"/>
-            <a:ext cx="11002975" cy="347472"/>
+            <a:off x="640080" y="4896612"/>
+            <a:ext cx="10911535" cy="310896"/>
           </a:xfrm>
           <a:prstGeom prst="rect">
             <a:avLst/>
@@ -3308,11 +3308,11 @@
             <a:r>
               <a:rPr sz="2000" b="0" i="1">
                 <a:solidFill>
-                  <a:srgbClr val="8C8C8C"/>
+                  <a:srgbClr val="828282"/>
                 </a:solidFill>
                 <a:latin typeface="Arial"/>
               </a:rPr>
-              <a:t/>
+              <a:t>Oh! Vinde, oh! Vinde até Belém.</a:t>
             </a:r>
           </a:p>
         </p:txBody>
@@ -3351,8 +3351,8 @@
         </p:nvSpPr>
         <p:spPr>
           <a:xfrm>
-            <a:off x="594360" y="2258568"/>
-            <a:ext cx="11002975" cy="685800"/>
+            <a:off x="640080" y="2052828"/>
+            <a:ext cx="10911535" cy="731520"/>
           </a:xfrm>
           <a:prstGeom prst="rect">
             <a:avLst/>
@@ -3367,7 +3367,7 @@
           <a:p>
             <a:pPr algn="ctr"/>
             <a:r>
-              <a:rPr sz="4400" b="1" i="0">
+              <a:rPr sz="4800" b="1" i="0">
                 <a:solidFill>
                   <a:srgbClr val="FFFFFF"/>
                 </a:solidFill>
@@ -3386,8 +3386,8 @@
         </p:nvSpPr>
         <p:spPr>
           <a:xfrm>
-            <a:off x="594360" y="2980944"/>
-            <a:ext cx="11002975" cy="347472"/>
+            <a:off x="640080" y="2985516"/>
+            <a:ext cx="10911535" cy="731520"/>
           </a:xfrm>
           <a:prstGeom prst="rect">
             <a:avLst/>
@@ -3402,83 +3402,13 @@
           <a:p>
             <a:pPr algn="ctr"/>
             <a:r>
-              <a:rPr sz="2200" b="0" i="1">
-                <a:solidFill>
-                  <a:srgbClr val="8C8C8C"/>
-                </a:solidFill>
-                <a:latin typeface="Arial"/>
-              </a:rPr>
-              <a:t/>
-            </a:r>
-          </a:p>
-        </p:txBody>
-      </p:sp>
-      <p:sp>
-        <p:nvSpPr>
-          <p:cNvPr id="4" name="TextBox 3"/>
-          <p:cNvSpPr txBox="1"/>
-          <p:nvPr/>
-        </p:nvSpPr>
-        <p:spPr>
-          <a:xfrm>
-            <a:off x="594360" y="3529584"/>
-            <a:ext cx="11002975" cy="685800"/>
-          </a:xfrm>
-          <a:prstGeom prst="rect">
-            <a:avLst/>
-          </a:prstGeom>
-          <a:noFill/>
-        </p:spPr>
-        <p:txBody>
-          <a:bodyPr wrap="square">
-            <a:spAutoFit/>
-          </a:bodyPr>
-          <a:lstStyle/>
-          <a:p>
-            <a:pPr algn="ctr"/>
-            <a:r>
-              <a:rPr sz="4400" b="1" i="0">
+              <a:rPr sz="4800" b="1" i="0">
                 <a:solidFill>
                   <a:srgbClr val="FFFFFF"/>
                 </a:solidFill>
                 <a:latin typeface="Arial"/>
               </a:rPr>
               <a:t>Oh! Vinde adoremos o Salvador!</a:t>
-            </a:r>
-          </a:p>
-        </p:txBody>
-      </p:sp>
-      <p:sp>
-        <p:nvSpPr>
-          <p:cNvPr id="5" name="TextBox 4"/>
-          <p:cNvSpPr txBox="1"/>
-          <p:nvPr/>
-        </p:nvSpPr>
-        <p:spPr>
-          <a:xfrm>
-            <a:off x="594360" y="4251960"/>
-            <a:ext cx="11002975" cy="347472"/>
-          </a:xfrm>
-          <a:prstGeom prst="rect">
-            <a:avLst/>
-          </a:prstGeom>
-          <a:noFill/>
-        </p:spPr>
-        <p:txBody>
-          <a:bodyPr wrap="square">
-            <a:spAutoFit/>
-          </a:bodyPr>
-          <a:lstStyle/>
-          <a:p>
-            <a:pPr algn="ctr"/>
-            <a:r>
-              <a:rPr sz="2200" b="0" i="1">
-                <a:solidFill>
-                  <a:srgbClr val="8C8C8C"/>
-                </a:solidFill>
-                <a:latin typeface="Arial"/>
-              </a:rPr>
-              <a:t/>
             </a:r>
           </a:p>
         </p:txBody>
@@ -3517,8 +3447,8 @@
         </p:nvSpPr>
         <p:spPr>
           <a:xfrm>
-            <a:off x="594360" y="2258568"/>
-            <a:ext cx="11002975" cy="685800"/>
+            <a:off x="640080" y="2052828"/>
+            <a:ext cx="10911535" cy="731520"/>
           </a:xfrm>
           <a:prstGeom prst="rect">
             <a:avLst/>
@@ -3533,7 +3463,7 @@
           <a:p>
             <a:pPr algn="ctr"/>
             <a:r>
-              <a:rPr sz="4400" b="1" i="0">
+              <a:rPr sz="4800" b="1" i="0">
                 <a:solidFill>
                   <a:srgbClr val="FFFFFF"/>
                 </a:solidFill>
@@ -3552,8 +3482,8 @@
         </p:nvSpPr>
         <p:spPr>
           <a:xfrm>
-            <a:off x="594360" y="2980944"/>
-            <a:ext cx="11002975" cy="347472"/>
+            <a:off x="640080" y="2985516"/>
+            <a:ext cx="10911535" cy="731520"/>
           </a:xfrm>
           <a:prstGeom prst="rect">
             <a:avLst/>
@@ -3568,83 +3498,13 @@
           <a:p>
             <a:pPr algn="ctr"/>
             <a:r>
-              <a:rPr sz="2200" b="0" i="1">
-                <a:solidFill>
-                  <a:srgbClr val="8C8C8C"/>
-                </a:solidFill>
-                <a:latin typeface="Arial"/>
-              </a:rPr>
-              <a:t/>
-            </a:r>
-          </a:p>
-        </p:txBody>
-      </p:sp>
-      <p:sp>
-        <p:nvSpPr>
-          <p:cNvPr id="4" name="TextBox 3"/>
-          <p:cNvSpPr txBox="1"/>
-          <p:nvPr/>
-        </p:nvSpPr>
-        <p:spPr>
-          <a:xfrm>
-            <a:off x="594360" y="3529584"/>
-            <a:ext cx="11002975" cy="685800"/>
-          </a:xfrm>
-          <a:prstGeom prst="rect">
-            <a:avLst/>
-          </a:prstGeom>
-          <a:noFill/>
-        </p:spPr>
-        <p:txBody>
-          <a:bodyPr wrap="square">
-            <a:spAutoFit/>
-          </a:bodyPr>
-          <a:lstStyle/>
-          <a:p>
-            <a:pPr algn="ctr"/>
-            <a:r>
-              <a:rPr sz="4400" b="1" i="0">
+              <a:rPr sz="4800" b="1" i="0">
                 <a:solidFill>
                   <a:srgbClr val="FFFFFF"/>
                 </a:solidFill>
                 <a:latin typeface="Arial"/>
               </a:rPr>
               <a:t>Oh! Vinde adoremos o Salvador!</a:t>
-            </a:r>
-          </a:p>
-        </p:txBody>
-      </p:sp>
-      <p:sp>
-        <p:nvSpPr>
-          <p:cNvPr id="5" name="TextBox 4"/>
-          <p:cNvSpPr txBox="1"/>
-          <p:nvPr/>
-        </p:nvSpPr>
-        <p:spPr>
-          <a:xfrm>
-            <a:off x="594360" y="4251960"/>
-            <a:ext cx="11002975" cy="347472"/>
-          </a:xfrm>
-          <a:prstGeom prst="rect">
-            <a:avLst/>
-          </a:prstGeom>
-          <a:noFill/>
-        </p:spPr>
-        <p:txBody>
-          <a:bodyPr wrap="square">
-            <a:spAutoFit/>
-          </a:bodyPr>
-          <a:lstStyle/>
-          <a:p>
-            <a:pPr algn="ctr"/>
-            <a:r>
-              <a:rPr sz="2200" b="0" i="1">
-                <a:solidFill>
-                  <a:srgbClr val="8C8C8C"/>
-                </a:solidFill>
-                <a:latin typeface="Arial"/>
-              </a:rPr>
-              <a:t/>
             </a:r>
           </a:p>
         </p:txBody>
@@ -3683,8 +3543,8 @@
         </p:nvSpPr>
         <p:spPr>
           <a:xfrm>
-            <a:off x="594360" y="2258568"/>
-            <a:ext cx="11002975" cy="685800"/>
+            <a:off x="640080" y="2052828"/>
+            <a:ext cx="10911535" cy="731520"/>
           </a:xfrm>
           <a:prstGeom prst="rect">
             <a:avLst/>
@@ -3699,7 +3559,7 @@
           <a:p>
             <a:pPr algn="ctr"/>
             <a:r>
-              <a:rPr sz="4400" b="1" i="0">
+              <a:rPr sz="4800" b="1" i="0">
                 <a:solidFill>
                   <a:srgbClr val="FFFFFF"/>
                 </a:solidFill>
@@ -3718,8 +3578,8 @@
         </p:nvSpPr>
         <p:spPr>
           <a:xfrm>
-            <a:off x="594360" y="2980944"/>
-            <a:ext cx="11002975" cy="347472"/>
+            <a:off x="640080" y="2985516"/>
+            <a:ext cx="10911535" cy="731520"/>
           </a:xfrm>
           <a:prstGeom prst="rect">
             <a:avLst/>
@@ -3734,83 +3594,13 @@
           <a:p>
             <a:pPr algn="ctr"/>
             <a:r>
-              <a:rPr sz="2200" b="0" i="1">
-                <a:solidFill>
-                  <a:srgbClr val="8C8C8C"/>
-                </a:solidFill>
-                <a:latin typeface="Arial"/>
-              </a:rPr>
-              <a:t/>
-            </a:r>
-          </a:p>
-        </p:txBody>
-      </p:sp>
-      <p:sp>
-        <p:nvSpPr>
-          <p:cNvPr id="4" name="TextBox 3"/>
-          <p:cNvSpPr txBox="1"/>
-          <p:nvPr/>
-        </p:nvSpPr>
-        <p:spPr>
-          <a:xfrm>
-            <a:off x="594360" y="3529584"/>
-            <a:ext cx="11002975" cy="685800"/>
-          </a:xfrm>
-          <a:prstGeom prst="rect">
-            <a:avLst/>
-          </a:prstGeom>
-          <a:noFill/>
-        </p:spPr>
-        <p:txBody>
-          <a:bodyPr wrap="square">
-            <a:spAutoFit/>
-          </a:bodyPr>
-          <a:lstStyle/>
-          <a:p>
-            <a:pPr algn="ctr"/>
-            <a:r>
-              <a:rPr sz="4400" b="1" i="0">
+              <a:rPr sz="4800" b="1" i="0">
                 <a:solidFill>
                   <a:srgbClr val="FFFFFF"/>
                 </a:solidFill>
                 <a:latin typeface="Arial"/>
               </a:rPr>
               <a:t>Oh! Vinde adoremos o Salvador!</a:t>
-            </a:r>
-          </a:p>
-        </p:txBody>
-      </p:sp>
-      <p:sp>
-        <p:nvSpPr>
-          <p:cNvPr id="5" name="TextBox 4"/>
-          <p:cNvSpPr txBox="1"/>
-          <p:nvPr/>
-        </p:nvSpPr>
-        <p:spPr>
-          <a:xfrm>
-            <a:off x="594360" y="4251960"/>
-            <a:ext cx="11002975" cy="347472"/>
-          </a:xfrm>
-          <a:prstGeom prst="rect">
-            <a:avLst/>
-          </a:prstGeom>
-          <a:noFill/>
-        </p:spPr>
-        <p:txBody>
-          <a:bodyPr wrap="square">
-            <a:spAutoFit/>
-          </a:bodyPr>
-          <a:lstStyle/>
-          <a:p>
-            <a:pPr algn="ctr"/>
-            <a:r>
-              <a:rPr sz="2200" b="0" i="1">
-                <a:solidFill>
-                  <a:srgbClr val="8C8C8C"/>
-                </a:solidFill>
-                <a:latin typeface="Arial"/>
-              </a:rPr>
-              <a:t/>
             </a:r>
           </a:p>
         </p:txBody>
@@ -3849,8 +3639,8 @@
         </p:nvSpPr>
         <p:spPr>
           <a:xfrm>
-            <a:off x="594360" y="1837944"/>
-            <a:ext cx="11002975" cy="685800"/>
+            <a:off x="640080" y="1650492"/>
+            <a:ext cx="10911535" cy="731520"/>
           </a:xfrm>
           <a:prstGeom prst="rect">
             <a:avLst/>
@@ -3865,7 +3655,7 @@
           <a:p>
             <a:pPr algn="ctr"/>
             <a:r>
-              <a:rPr sz="4400" b="1" i="0">
+              <a:rPr sz="4800" b="1" i="0">
                 <a:solidFill>
                   <a:srgbClr val="FFFFFF"/>
                 </a:solidFill>
@@ -3884,8 +3674,8 @@
         </p:nvSpPr>
         <p:spPr>
           <a:xfrm>
-            <a:off x="594360" y="2560320"/>
-            <a:ext cx="11002975" cy="384048"/>
+            <a:off x="640080" y="2418588"/>
+            <a:ext cx="10911535" cy="365760"/>
           </a:xfrm>
           <a:prstGeom prst="rect">
             <a:avLst/>
@@ -3902,7 +3692,7 @@
             <a:r>
               <a:rPr sz="2400" b="0" i="1">
                 <a:solidFill>
-                  <a:srgbClr val="B4B4B4"/>
+                  <a:srgbClr val="AAAAAA"/>
                 </a:solidFill>
                 <a:latin typeface="Arial"/>
               </a:rPr>
@@ -3919,8 +3709,8 @@
         </p:nvSpPr>
         <p:spPr>
           <a:xfrm>
-            <a:off x="594360" y="2980944"/>
-            <a:ext cx="11002975" cy="347472"/>
+            <a:off x="640080" y="2985516"/>
+            <a:ext cx="10911535" cy="731520"/>
           </a:xfrm>
           <a:prstGeom prst="rect">
             <a:avLst/>
@@ -3935,13 +3725,13 @@
           <a:p>
             <a:pPr algn="ctr"/>
             <a:r>
-              <a:rPr sz="2000" b="0" i="1">
-                <a:solidFill>
-                  <a:srgbClr val="8C8C8C"/>
+              <a:rPr sz="4800" b="1" i="0">
+                <a:solidFill>
+                  <a:srgbClr val="FFFFFF"/>
                 </a:solidFill>
                 <a:latin typeface="Arial"/>
               </a:rPr>
-              <a:t/>
+              <a:t>いそぎゆきて    拝まずや-</a:t>
             </a:r>
           </a:p>
         </p:txBody>
@@ -3954,8 +3744,8 @@
         </p:nvSpPr>
         <p:spPr>
           <a:xfrm>
-            <a:off x="594360" y="3529584"/>
-            <a:ext cx="11002975" cy="685800"/>
+            <a:off x="640080" y="3753612"/>
+            <a:ext cx="10911535" cy="365760"/>
           </a:xfrm>
           <a:prstGeom prst="rect">
             <a:avLst/>
@@ -3970,13 +3760,13 @@
           <a:p>
             <a:pPr algn="ctr"/>
             <a:r>
-              <a:rPr sz="4400" b="1" i="0">
-                <a:solidFill>
-                  <a:srgbClr val="FFFFFF"/>
+              <a:rPr sz="2400" b="0" i="1">
+                <a:solidFill>
+                  <a:srgbClr val="AAAAAA"/>
                 </a:solidFill>
                 <a:latin typeface="Arial"/>
               </a:rPr>
-              <a:t>いそぎゆきて    拝まずや-</a:t>
+              <a:t>isogi yukite ogamazuya</a:t>
             </a:r>
           </a:p>
         </p:txBody>
@@ -3989,8 +3779,8 @@
         </p:nvSpPr>
         <p:spPr>
           <a:xfrm>
-            <a:off x="594360" y="4251960"/>
-            <a:ext cx="11002975" cy="384048"/>
+            <a:off x="640080" y="4530852"/>
+            <a:ext cx="10911535" cy="310896"/>
           </a:xfrm>
           <a:prstGeom prst="rect">
             <a:avLst/>
@@ -4005,13 +3795,13 @@
           <a:p>
             <a:pPr algn="ctr"/>
             <a:r>
-              <a:rPr sz="2400" b="0" i="1">
-                <a:solidFill>
-                  <a:srgbClr val="B4B4B4"/>
+              <a:rPr sz="2000" b="0" i="1">
+                <a:solidFill>
+                  <a:srgbClr val="828282"/>
                 </a:solidFill>
                 <a:latin typeface="Arial"/>
               </a:rPr>
-              <a:t>isogi yukite ogamazuya</a:t>
+              <a:t>Vede nascido, vosso rei eterno.</a:t>
             </a:r>
           </a:p>
         </p:txBody>
@@ -4024,8 +3814,8 @@
         </p:nvSpPr>
         <p:spPr>
           <a:xfrm>
-            <a:off x="594360" y="4672584"/>
-            <a:ext cx="11002975" cy="347472"/>
+            <a:off x="640080" y="4896612"/>
+            <a:ext cx="10911535" cy="310896"/>
           </a:xfrm>
           <a:prstGeom prst="rect">
             <a:avLst/>
@@ -4042,11 +3832,11 @@
             <a:r>
               <a:rPr sz="2000" b="0" i="1">
                 <a:solidFill>
-                  <a:srgbClr val="8C8C8C"/>
+                  <a:srgbClr val="828282"/>
                 </a:solidFill>
                 <a:latin typeface="Arial"/>
               </a:rPr>
-              <a:t/>
+              <a:t>Oh! Vinde adoremos,</a:t>
             </a:r>
           </a:p>
         </p:txBody>
@@ -4085,8 +3875,8 @@
         </p:nvSpPr>
         <p:spPr>
           <a:xfrm>
-            <a:off x="594360" y="2683764"/>
-            <a:ext cx="11002975" cy="685800"/>
+            <a:off x="640080" y="2500884"/>
+            <a:ext cx="10911535" cy="731520"/>
           </a:xfrm>
           <a:prstGeom prst="rect">
             <a:avLst/>
@@ -4101,7 +3891,7 @@
           <a:p>
             <a:pPr algn="ctr"/>
             <a:r>
-              <a:rPr sz="4400" b="1" i="0">
+              <a:rPr sz="4800" b="1" i="0">
                 <a:solidFill>
                   <a:srgbClr val="FFFFFF"/>
                 </a:solidFill>
@@ -4120,8 +3910,8 @@
         </p:nvSpPr>
         <p:spPr>
           <a:xfrm>
-            <a:off x="594360" y="3406140"/>
-            <a:ext cx="11002975" cy="384048"/>
+            <a:off x="640080" y="3268980"/>
+            <a:ext cx="10911535" cy="365760"/>
           </a:xfrm>
           <a:prstGeom prst="rect">
             <a:avLst/>
@@ -4138,7 +3928,7 @@
             <a:r>
               <a:rPr sz="2400" b="0" i="1">
                 <a:solidFill>
-                  <a:srgbClr val="B4B4B4"/>
+                  <a:srgbClr val="AAAAAA"/>
                 </a:solidFill>
                 <a:latin typeface="Arial"/>
               </a:rPr>
@@ -4155,8 +3945,8 @@
         </p:nvSpPr>
         <p:spPr>
           <a:xfrm>
-            <a:off x="594360" y="3826764"/>
-            <a:ext cx="11002975" cy="347472"/>
+            <a:off x="640080" y="4046220"/>
+            <a:ext cx="10911535" cy="310896"/>
           </a:xfrm>
           <a:prstGeom prst="rect">
             <a:avLst/>
@@ -4173,11 +3963,11 @@
             <a:r>
               <a:rPr sz="2000" b="0" i="1">
                 <a:solidFill>
-                  <a:srgbClr val="8C8C8C"/>
+                  <a:srgbClr val="828282"/>
                 </a:solidFill>
                 <a:latin typeface="Arial"/>
               </a:rPr>
-              <a:t/>
+              <a:t>Oh! Vinde adoremos,</a:t>
             </a:r>
           </a:p>
         </p:txBody>
@@ -4216,8 +4006,8 @@
         </p:nvSpPr>
         <p:spPr>
           <a:xfrm>
-            <a:off x="594360" y="2258568"/>
-            <a:ext cx="11002975" cy="685800"/>
+            <a:off x="640080" y="2052828"/>
+            <a:ext cx="10911535" cy="731520"/>
           </a:xfrm>
           <a:prstGeom prst="rect">
             <a:avLst/>
@@ -4232,7 +4022,7 @@
           <a:p>
             <a:pPr algn="ctr"/>
             <a:r>
-              <a:rPr sz="3352" b="1" i="0">
+              <a:rPr sz="3600" b="1" i="0">
                 <a:solidFill>
                   <a:srgbClr val="FFFFFF"/>
                 </a:solidFill>
@@ -4251,8 +4041,8 @@
         </p:nvSpPr>
         <p:spPr>
           <a:xfrm>
-            <a:off x="594360" y="2980944"/>
-            <a:ext cx="11002975" cy="347472"/>
+            <a:off x="640080" y="2985516"/>
+            <a:ext cx="10911535" cy="731520"/>
           </a:xfrm>
           <a:prstGeom prst="rect">
             <a:avLst/>
@@ -4267,13 +4057,13 @@
           <a:p>
             <a:pPr algn="ctr"/>
             <a:r>
-              <a:rPr sz="2200" b="0" i="1">
-                <a:solidFill>
-                  <a:srgbClr val="8C8C8C"/>
+              <a:rPr sz="4800" b="1" i="0">
+                <a:solidFill>
+                  <a:srgbClr val="FFFFFF"/>
                 </a:solidFill>
                 <a:latin typeface="Arial"/>
               </a:rPr>
-              <a:t/>
+              <a:t>Oh! Vinde, oh! Vinde até Belém.</a:t>
             </a:r>
           </a:p>
         </p:txBody>
@@ -4286,8 +4076,8 @@
         </p:nvSpPr>
         <p:spPr>
           <a:xfrm>
-            <a:off x="594360" y="3529584"/>
-            <a:ext cx="11002975" cy="685800"/>
+            <a:off x="640080" y="4128516"/>
+            <a:ext cx="10911535" cy="310896"/>
           </a:xfrm>
           <a:prstGeom prst="rect">
             <a:avLst/>
@@ -4302,13 +4092,13 @@
           <a:p>
             <a:pPr algn="ctr"/>
             <a:r>
-              <a:rPr sz="4400" b="1" i="0">
-                <a:solidFill>
-                  <a:srgbClr val="FFFFFF"/>
+              <a:rPr sz="2000" b="0" i="0">
+                <a:solidFill>
+                  <a:srgbClr val="828282"/>
                 </a:solidFill>
                 <a:latin typeface="Arial"/>
               </a:rPr>
-              <a:t>Oh! Vinde, oh! Vinde até Belém.</a:t>
+              <a:t>神の御子-は-     今宵しも</a:t>
             </a:r>
           </a:p>
         </p:txBody>
@@ -4321,8 +4111,8 @@
         </p:nvSpPr>
         <p:spPr>
           <a:xfrm>
-            <a:off x="594360" y="4251960"/>
-            <a:ext cx="11002975" cy="347472"/>
+            <a:off x="640080" y="4494276"/>
+            <a:ext cx="10911535" cy="310896"/>
           </a:xfrm>
           <a:prstGeom prst="rect">
             <a:avLst/>
@@ -4337,13 +4127,13 @@
           <a:p>
             <a:pPr algn="ctr"/>
             <a:r>
-              <a:rPr sz="2200" b="0" i="1">
-                <a:solidFill>
-                  <a:srgbClr val="8C8C8C"/>
+              <a:rPr sz="2000" b="0" i="0">
+                <a:solidFill>
+                  <a:srgbClr val="828282"/>
                 </a:solidFill>
                 <a:latin typeface="Arial"/>
               </a:rPr>
-              <a:t/>
+              <a:t>ベツレヘムに    生ま-れ-たもう</a:t>
             </a:r>
           </a:p>
         </p:txBody>
@@ -4382,8 +4172,8 @@
         </p:nvSpPr>
         <p:spPr>
           <a:xfrm>
-            <a:off x="594360" y="2258568"/>
-            <a:ext cx="11002975" cy="685800"/>
+            <a:off x="640080" y="2052828"/>
+            <a:ext cx="10911535" cy="731520"/>
           </a:xfrm>
           <a:prstGeom prst="rect">
             <a:avLst/>
@@ -4398,7 +4188,7 @@
           <a:p>
             <a:pPr algn="ctr"/>
             <a:r>
-              <a:rPr sz="4400" b="1" i="0">
+              <a:rPr sz="4800" b="1" i="0">
                 <a:solidFill>
                   <a:srgbClr val="FFFFFF"/>
                 </a:solidFill>
@@ -4417,8 +4207,8 @@
         </p:nvSpPr>
         <p:spPr>
           <a:xfrm>
-            <a:off x="594360" y="2980944"/>
-            <a:ext cx="11002975" cy="347472"/>
+            <a:off x="640080" y="2985516"/>
+            <a:ext cx="10911535" cy="731520"/>
           </a:xfrm>
           <a:prstGeom prst="rect">
             <a:avLst/>
@@ -4433,13 +4223,13 @@
           <a:p>
             <a:pPr algn="ctr"/>
             <a:r>
-              <a:rPr sz="2200" b="0" i="1">
-                <a:solidFill>
-                  <a:srgbClr val="8C8C8C"/>
+              <a:rPr sz="4800" b="1" i="0">
+                <a:solidFill>
+                  <a:srgbClr val="FFFFFF"/>
                 </a:solidFill>
                 <a:latin typeface="Arial"/>
               </a:rPr>
-              <a:t/>
+              <a:t>Oh! Vinde adoremos,</a:t>
             </a:r>
           </a:p>
         </p:txBody>
@@ -4452,8 +4242,8 @@
         </p:nvSpPr>
         <p:spPr>
           <a:xfrm>
-            <a:off x="594360" y="3529584"/>
-            <a:ext cx="11002975" cy="685800"/>
+            <a:off x="640080" y="4128516"/>
+            <a:ext cx="10911535" cy="310896"/>
           </a:xfrm>
           <a:prstGeom prst="rect">
             <a:avLst/>
@@ -4468,13 +4258,13 @@
           <a:p>
             <a:pPr algn="ctr"/>
             <a:r>
-              <a:rPr sz="4400" b="1" i="0">
-                <a:solidFill>
-                  <a:srgbClr val="FFFFFF"/>
+              <a:rPr sz="2000" b="0" i="0">
+                <a:solidFill>
+                  <a:srgbClr val="828282"/>
                 </a:solidFill>
                 <a:latin typeface="Arial"/>
               </a:rPr>
-              <a:t>Oh! Vinde adoremos,</a:t>
+              <a:t>いざや  友よ、  もろともに</a:t>
             </a:r>
           </a:p>
         </p:txBody>
@@ -4487,8 +4277,8 @@
         </p:nvSpPr>
         <p:spPr>
           <a:xfrm>
-            <a:off x="594360" y="4251960"/>
-            <a:ext cx="11002975" cy="347472"/>
+            <a:off x="640080" y="4494276"/>
+            <a:ext cx="10911535" cy="310896"/>
           </a:xfrm>
           <a:prstGeom prst="rect">
             <a:avLst/>
@@ -4503,13 +4293,13 @@
           <a:p>
             <a:pPr algn="ctr"/>
             <a:r>
-              <a:rPr sz="2200" b="0" i="1">
-                <a:solidFill>
-                  <a:srgbClr val="8C8C8C"/>
+              <a:rPr sz="2000" b="0" i="0">
+                <a:solidFill>
+                  <a:srgbClr val="828282"/>
                 </a:solidFill>
                 <a:latin typeface="Arial"/>
               </a:rPr>
-              <a:t/>
+              <a:t>いそぎゆきて    拝まずや-</a:t>
             </a:r>
           </a:p>
         </p:txBody>
@@ -4548,8 +4338,8 @@
         </p:nvSpPr>
         <p:spPr>
           <a:xfrm>
-            <a:off x="594360" y="2258568"/>
-            <a:ext cx="11002975" cy="685800"/>
+            <a:off x="640080" y="2052828"/>
+            <a:ext cx="10911535" cy="731520"/>
           </a:xfrm>
           <a:prstGeom prst="rect">
             <a:avLst/>
@@ -4564,7 +4354,7 @@
           <a:p>
             <a:pPr algn="ctr"/>
             <a:r>
-              <a:rPr sz="4400" b="1" i="0">
+              <a:rPr sz="4800" b="1" i="0">
                 <a:solidFill>
                   <a:srgbClr val="FFFFFF"/>
                 </a:solidFill>
@@ -4583,8 +4373,8 @@
         </p:nvSpPr>
         <p:spPr>
           <a:xfrm>
-            <a:off x="594360" y="2980944"/>
-            <a:ext cx="11002975" cy="347472"/>
+            <a:off x="640080" y="2985516"/>
+            <a:ext cx="10911535" cy="731520"/>
           </a:xfrm>
           <a:prstGeom prst="rect">
             <a:avLst/>
@@ -4599,13 +4389,13 @@
           <a:p>
             <a:pPr algn="ctr"/>
             <a:r>
-              <a:rPr sz="2200" b="0" i="1">
-                <a:solidFill>
-                  <a:srgbClr val="8C8C8C"/>
+              <a:rPr sz="4800" b="1" i="0">
+                <a:solidFill>
+                  <a:srgbClr val="FFFFFF"/>
                 </a:solidFill>
                 <a:latin typeface="Arial"/>
               </a:rPr>
-              <a:t/>
+              <a:t>Oh! Vinde adoremos o Salvador!</a:t>
             </a:r>
           </a:p>
         </p:txBody>
@@ -4618,8 +4408,8 @@
         </p:nvSpPr>
         <p:spPr>
           <a:xfrm>
-            <a:off x="594360" y="3529584"/>
-            <a:ext cx="11002975" cy="685800"/>
+            <a:off x="640080" y="4128516"/>
+            <a:ext cx="10911535" cy="310896"/>
           </a:xfrm>
           <a:prstGeom prst="rect">
             <a:avLst/>
@@ -4634,48 +4424,13 @@
           <a:p>
             <a:pPr algn="ctr"/>
             <a:r>
-              <a:rPr sz="4400" b="1" i="0">
-                <a:solidFill>
-                  <a:srgbClr val="FFFFFF"/>
+              <a:rPr sz="2000" b="0" i="0">
+                <a:solidFill>
+                  <a:srgbClr val="828282"/>
                 </a:solidFill>
                 <a:latin typeface="Arial"/>
               </a:rPr>
-              <a:t>Oh! Vinde adoremos o Salvador!</a:t>
-            </a:r>
-          </a:p>
-        </p:txBody>
-      </p:sp>
-      <p:sp>
-        <p:nvSpPr>
-          <p:cNvPr id="5" name="TextBox 4"/>
-          <p:cNvSpPr txBox="1"/>
-          <p:nvPr/>
-        </p:nvSpPr>
-        <p:spPr>
-          <a:xfrm>
-            <a:off x="594360" y="4251960"/>
-            <a:ext cx="11002975" cy="347472"/>
-          </a:xfrm>
-          <a:prstGeom prst="rect">
-            <a:avLst/>
-          </a:prstGeom>
-          <a:noFill/>
-        </p:spPr>
-        <p:txBody>
-          <a:bodyPr wrap="square">
-            <a:spAutoFit/>
-          </a:bodyPr>
-          <a:lstStyle/>
-          <a:p>
-            <a:pPr algn="ctr"/>
-            <a:r>
-              <a:rPr sz="2200" b="0" i="1">
-                <a:solidFill>
-                  <a:srgbClr val="8C8C8C"/>
-                </a:solidFill>
-                <a:latin typeface="Arial"/>
-              </a:rPr>
-              <a:t/>
+              <a:t>いそぎゆきて          拝まずや。</a:t>
             </a:r>
           </a:p>
         </p:txBody>
@@ -4714,8 +4469,8 @@
         </p:nvSpPr>
         <p:spPr>
           <a:xfrm>
-            <a:off x="594360" y="2258568"/>
-            <a:ext cx="11002975" cy="685800"/>
+            <a:off x="640080" y="2052828"/>
+            <a:ext cx="10911535" cy="731520"/>
           </a:xfrm>
           <a:prstGeom prst="rect">
             <a:avLst/>
@@ -4730,7 +4485,7 @@
           <a:p>
             <a:pPr algn="ctr"/>
             <a:r>
-              <a:rPr sz="3911" b="1" i="0">
+              <a:rPr sz="4200" b="1" i="0">
                 <a:solidFill>
                   <a:srgbClr val="FFFFFF"/>
                 </a:solidFill>
@@ -4749,8 +4504,8 @@
         </p:nvSpPr>
         <p:spPr>
           <a:xfrm>
-            <a:off x="594360" y="2980944"/>
-            <a:ext cx="11002975" cy="347472"/>
+            <a:off x="640080" y="2985516"/>
+            <a:ext cx="10911535" cy="731520"/>
           </a:xfrm>
           <a:prstGeom prst="rect">
             <a:avLst/>
@@ -4765,83 +4520,13 @@
           <a:p>
             <a:pPr algn="ctr"/>
             <a:r>
-              <a:rPr sz="2200" b="0" i="1">
-                <a:solidFill>
-                  <a:srgbClr val="8C8C8C"/>
-                </a:solidFill>
-                <a:latin typeface="Arial"/>
-              </a:rPr>
-              <a:t/>
-            </a:r>
-          </a:p>
-        </p:txBody>
-      </p:sp>
-      <p:sp>
-        <p:nvSpPr>
-          <p:cNvPr id="4" name="TextBox 3"/>
-          <p:cNvSpPr txBox="1"/>
-          <p:nvPr/>
-        </p:nvSpPr>
-        <p:spPr>
-          <a:xfrm>
-            <a:off x="594360" y="3529584"/>
-            <a:ext cx="11002975" cy="685800"/>
-          </a:xfrm>
-          <a:prstGeom prst="rect">
-            <a:avLst/>
-          </a:prstGeom>
-          <a:noFill/>
-        </p:spPr>
-        <p:txBody>
-          <a:bodyPr wrap="square">
-            <a:spAutoFit/>
-          </a:bodyPr>
-          <a:lstStyle/>
-          <a:p>
-            <a:pPr algn="ctr"/>
-            <a:r>
-              <a:rPr sz="4400" b="1" i="0">
+              <a:rPr sz="4800" b="1" i="0">
                 <a:solidFill>
                   <a:srgbClr val="FFFFFF"/>
                 </a:solidFill>
                 <a:latin typeface="Arial"/>
               </a:rPr>
               <a:t>E alegres acorrem ao rei do céu.</a:t>
-            </a:r>
-          </a:p>
-        </p:txBody>
-      </p:sp>
-      <p:sp>
-        <p:nvSpPr>
-          <p:cNvPr id="5" name="TextBox 4"/>
-          <p:cNvSpPr txBox="1"/>
-          <p:nvPr/>
-        </p:nvSpPr>
-        <p:spPr>
-          <a:xfrm>
-            <a:off x="594360" y="4251960"/>
-            <a:ext cx="11002975" cy="347472"/>
-          </a:xfrm>
-          <a:prstGeom prst="rect">
-            <a:avLst/>
-          </a:prstGeom>
-          <a:noFill/>
-        </p:spPr>
-        <p:txBody>
-          <a:bodyPr wrap="square">
-            <a:spAutoFit/>
-          </a:bodyPr>
-          <a:lstStyle/>
-          <a:p>
-            <a:pPr algn="ctr"/>
-            <a:r>
-              <a:rPr sz="2200" b="0" i="1">
-                <a:solidFill>
-                  <a:srgbClr val="8C8C8C"/>
-                </a:solidFill>
-                <a:latin typeface="Arial"/>
-              </a:rPr>
-              <a:t/>
             </a:r>
           </a:p>
         </p:txBody>
@@ -4880,8 +4565,8 @@
         </p:nvSpPr>
         <p:spPr>
           <a:xfrm>
-            <a:off x="594360" y="2894076"/>
-            <a:ext cx="11002975" cy="685800"/>
+            <a:off x="640080" y="2702052"/>
+            <a:ext cx="10911535" cy="731520"/>
           </a:xfrm>
           <a:prstGeom prst="rect">
             <a:avLst/>
@@ -4896,48 +4581,13 @@
           <a:p>
             <a:pPr algn="ctr"/>
             <a:r>
-              <a:rPr sz="4022" b="1" i="0">
+              <a:rPr sz="4300" b="1" i="0">
                 <a:solidFill>
                   <a:srgbClr val="FFFFFF"/>
                 </a:solidFill>
                 <a:latin typeface="Arial"/>
               </a:rPr>
               <a:t>Nós, igualmente, cheios de alegria.</a:t>
-            </a:r>
-          </a:p>
-        </p:txBody>
-      </p:sp>
-      <p:sp>
-        <p:nvSpPr>
-          <p:cNvPr id="3" name="TextBox 2"/>
-          <p:cNvSpPr txBox="1"/>
-          <p:nvPr/>
-        </p:nvSpPr>
-        <p:spPr>
-          <a:xfrm>
-            <a:off x="594360" y="3616452"/>
-            <a:ext cx="11002975" cy="347472"/>
-          </a:xfrm>
-          <a:prstGeom prst="rect">
-            <a:avLst/>
-          </a:prstGeom>
-          <a:noFill/>
-        </p:spPr>
-        <p:txBody>
-          <a:bodyPr wrap="square">
-            <a:spAutoFit/>
-          </a:bodyPr>
-          <a:lstStyle/>
-          <a:p>
-            <a:pPr algn="ctr"/>
-            <a:r>
-              <a:rPr sz="2200" b="0" i="1">
-                <a:solidFill>
-                  <a:srgbClr val="8C8C8C"/>
-                </a:solidFill>
-                <a:latin typeface="Arial"/>
-              </a:rPr>
-              <a:t/>
             </a:r>
           </a:p>
         </p:txBody>
@@ -4976,8 +4626,8 @@
         </p:nvSpPr>
         <p:spPr>
           <a:xfrm>
-            <a:off x="594360" y="2258568"/>
-            <a:ext cx="11002975" cy="685800"/>
+            <a:off x="640080" y="2052828"/>
+            <a:ext cx="10911535" cy="731520"/>
           </a:xfrm>
           <a:prstGeom prst="rect">
             <a:avLst/>
@@ -4992,7 +4642,7 @@
           <a:p>
             <a:pPr algn="ctr"/>
             <a:r>
-              <a:rPr sz="4400" b="1" i="0">
+              <a:rPr sz="4800" b="1" i="0">
                 <a:solidFill>
                   <a:srgbClr val="FFFFFF"/>
                 </a:solidFill>
@@ -5011,8 +4661,8 @@
         </p:nvSpPr>
         <p:spPr>
           <a:xfrm>
-            <a:off x="594360" y="2980944"/>
-            <a:ext cx="11002975" cy="347472"/>
+            <a:off x="640080" y="2985516"/>
+            <a:ext cx="10911535" cy="731520"/>
           </a:xfrm>
           <a:prstGeom prst="rect">
             <a:avLst/>
@@ -5027,83 +4677,13 @@
           <a:p>
             <a:pPr algn="ctr"/>
             <a:r>
-              <a:rPr sz="2200" b="0" i="1">
-                <a:solidFill>
-                  <a:srgbClr val="8C8C8C"/>
-                </a:solidFill>
-                <a:latin typeface="Arial"/>
-              </a:rPr>
-              <a:t/>
-            </a:r>
-          </a:p>
-        </p:txBody>
-      </p:sp>
-      <p:sp>
-        <p:nvSpPr>
-          <p:cNvPr id="4" name="TextBox 3"/>
-          <p:cNvSpPr txBox="1"/>
-          <p:nvPr/>
-        </p:nvSpPr>
-        <p:spPr>
-          <a:xfrm>
-            <a:off x="594360" y="3529584"/>
-            <a:ext cx="11002975" cy="685800"/>
-          </a:xfrm>
-          <a:prstGeom prst="rect">
-            <a:avLst/>
-          </a:prstGeom>
-          <a:noFill/>
-        </p:spPr>
-        <p:txBody>
-          <a:bodyPr wrap="square">
-            <a:spAutoFit/>
-          </a:bodyPr>
-          <a:lstStyle/>
-          <a:p>
-            <a:pPr algn="ctr"/>
-            <a:r>
-              <a:rPr sz="4400" b="1" i="0">
+              <a:rPr sz="4800" b="1" i="0">
                 <a:solidFill>
                   <a:srgbClr val="FFFFFF"/>
                 </a:solidFill>
                 <a:latin typeface="Arial"/>
               </a:rPr>
               <a:t>Oh! Vinde adoremos o Salvador!</a:t>
-            </a:r>
-          </a:p>
-        </p:txBody>
-      </p:sp>
-      <p:sp>
-        <p:nvSpPr>
-          <p:cNvPr id="5" name="TextBox 4"/>
-          <p:cNvSpPr txBox="1"/>
-          <p:nvPr/>
-        </p:nvSpPr>
-        <p:spPr>
-          <a:xfrm>
-            <a:off x="594360" y="4251960"/>
-            <a:ext cx="11002975" cy="347472"/>
-          </a:xfrm>
-          <a:prstGeom prst="rect">
-            <a:avLst/>
-          </a:prstGeom>
-          <a:noFill/>
-        </p:spPr>
-        <p:txBody>
-          <a:bodyPr wrap="square">
-            <a:spAutoFit/>
-          </a:bodyPr>
-          <a:lstStyle/>
-          <a:p>
-            <a:pPr algn="ctr"/>
-            <a:r>
-              <a:rPr sz="2200" b="0" i="1">
-                <a:solidFill>
-                  <a:srgbClr val="8C8C8C"/>
-                </a:solidFill>
-                <a:latin typeface="Arial"/>
-              </a:rPr>
-              <a:t/>
             </a:r>
           </a:p>
         </p:txBody>

--- a/output_pptx/O_Come_All_Ye_Faithful.pptx
+++ b/output_pptx/O_Come_All_Ye_Faithful.pptx
@@ -3413,6 +3413,76 @@
           </a:p>
         </p:txBody>
       </p:sp>
+      <p:sp>
+        <p:nvSpPr>
+          <p:cNvPr id="4" name="TextBox 3"/>
+          <p:cNvSpPr txBox="1"/>
+          <p:nvPr/>
+        </p:nvSpPr>
+        <p:spPr>
+          <a:xfrm>
+            <a:off x="640080" y="4128516"/>
+            <a:ext cx="10911535" cy="310896"/>
+          </a:xfrm>
+          <a:prstGeom prst="rect">
+            <a:avLst/>
+          </a:prstGeom>
+          <a:noFill/>
+        </p:spPr>
+        <p:txBody>
+          <a:bodyPr wrap="square">
+            <a:spAutoFit/>
+          </a:bodyPr>
+          <a:lstStyle/>
+          <a:p>
+            <a:pPr algn="ctr"/>
+            <a:r>
+              <a:rPr sz="2000" b="0" i="0">
+                <a:solidFill>
+                  <a:srgbClr val="828282"/>
+                </a:solidFill>
+                <a:latin typeface="Arial"/>
+              </a:rPr>
+              <a:t>おお！礼拝しに来よ、</a:t>
+            </a:r>
+          </a:p>
+        </p:txBody>
+      </p:sp>
+      <p:sp>
+        <p:nvSpPr>
+          <p:cNvPr id="5" name="TextBox 4"/>
+          <p:cNvSpPr txBox="1"/>
+          <p:nvPr/>
+        </p:nvSpPr>
+        <p:spPr>
+          <a:xfrm>
+            <a:off x="640080" y="4494276"/>
+            <a:ext cx="10911535" cy="310896"/>
+          </a:xfrm>
+          <a:prstGeom prst="rect">
+            <a:avLst/>
+          </a:prstGeom>
+          <a:noFill/>
+        </p:spPr>
+        <p:txBody>
+          <a:bodyPr wrap="square">
+            <a:spAutoFit/>
+          </a:bodyPr>
+          <a:lstStyle/>
+          <a:p>
+            <a:pPr algn="ctr"/>
+            <a:r>
+              <a:rPr sz="2000" b="0" i="0">
+                <a:solidFill>
+                  <a:srgbClr val="828282"/>
+                </a:solidFill>
+                <a:latin typeface="Arial"/>
+              </a:rPr>
+              <a:t>おお！救い主を礼拝しに来よ！</a:t>
+            </a:r>
+          </a:p>
+        </p:txBody>
+      </p:sp>
     </p:spTree>
   </p:cSld>
   <p:clrMapOvr>
@@ -3509,6 +3579,76 @@
           </a:p>
         </p:txBody>
       </p:sp>
+      <p:sp>
+        <p:nvSpPr>
+          <p:cNvPr id="4" name="TextBox 3"/>
+          <p:cNvSpPr txBox="1"/>
+          <p:nvPr/>
+        </p:nvSpPr>
+        <p:spPr>
+          <a:xfrm>
+            <a:off x="640080" y="4128516"/>
+            <a:ext cx="10911535" cy="310896"/>
+          </a:xfrm>
+          <a:prstGeom prst="rect">
+            <a:avLst/>
+          </a:prstGeom>
+          <a:noFill/>
+        </p:spPr>
+        <p:txBody>
+          <a:bodyPr wrap="square">
+            <a:spAutoFit/>
+          </a:bodyPr>
+          <a:lstStyle/>
+          <a:p>
+            <a:pPr algn="ctr"/>
+            <a:r>
+              <a:rPr sz="2000" b="0" i="0">
+                <a:solidFill>
+                  <a:srgbClr val="828282"/>
+                </a:solidFill>
+                <a:latin typeface="Arial"/>
+              </a:rPr>
+              <a:t>おお！礼拝しに来よ、</a:t>
+            </a:r>
+          </a:p>
+        </p:txBody>
+      </p:sp>
+      <p:sp>
+        <p:nvSpPr>
+          <p:cNvPr id="5" name="TextBox 4"/>
+          <p:cNvSpPr txBox="1"/>
+          <p:nvPr/>
+        </p:nvSpPr>
+        <p:spPr>
+          <a:xfrm>
+            <a:off x="640080" y="4494276"/>
+            <a:ext cx="10911535" cy="310896"/>
+          </a:xfrm>
+          <a:prstGeom prst="rect">
+            <a:avLst/>
+          </a:prstGeom>
+          <a:noFill/>
+        </p:spPr>
+        <p:txBody>
+          <a:bodyPr wrap="square">
+            <a:spAutoFit/>
+          </a:bodyPr>
+          <a:lstStyle/>
+          <a:p>
+            <a:pPr algn="ctr"/>
+            <a:r>
+              <a:rPr sz="2000" b="0" i="0">
+                <a:solidFill>
+                  <a:srgbClr val="828282"/>
+                </a:solidFill>
+                <a:latin typeface="Arial"/>
+              </a:rPr>
+              <a:t>おお！救い主を礼拝しに来よ！</a:t>
+            </a:r>
+          </a:p>
+        </p:txBody>
+      </p:sp>
     </p:spTree>
   </p:cSld>
   <p:clrMapOvr>
@@ -3605,6 +3745,76 @@
           </a:p>
         </p:txBody>
       </p:sp>
+      <p:sp>
+        <p:nvSpPr>
+          <p:cNvPr id="4" name="TextBox 3"/>
+          <p:cNvSpPr txBox="1"/>
+          <p:nvPr/>
+        </p:nvSpPr>
+        <p:spPr>
+          <a:xfrm>
+            <a:off x="640080" y="4128516"/>
+            <a:ext cx="10911535" cy="310896"/>
+          </a:xfrm>
+          <a:prstGeom prst="rect">
+            <a:avLst/>
+          </a:prstGeom>
+          <a:noFill/>
+        </p:spPr>
+        <p:txBody>
+          <a:bodyPr wrap="square">
+            <a:spAutoFit/>
+          </a:bodyPr>
+          <a:lstStyle/>
+          <a:p>
+            <a:pPr algn="ctr"/>
+            <a:r>
+              <a:rPr sz="2000" b="0" i="0">
+                <a:solidFill>
+                  <a:srgbClr val="828282"/>
+                </a:solidFill>
+                <a:latin typeface="Arial"/>
+              </a:rPr>
+              <a:t>おお！礼拝しに来よ、</a:t>
+            </a:r>
+          </a:p>
+        </p:txBody>
+      </p:sp>
+      <p:sp>
+        <p:nvSpPr>
+          <p:cNvPr id="5" name="TextBox 4"/>
+          <p:cNvSpPr txBox="1"/>
+          <p:nvPr/>
+        </p:nvSpPr>
+        <p:spPr>
+          <a:xfrm>
+            <a:off x="640080" y="4494276"/>
+            <a:ext cx="10911535" cy="310896"/>
+          </a:xfrm>
+          <a:prstGeom prst="rect">
+            <a:avLst/>
+          </a:prstGeom>
+          <a:noFill/>
+        </p:spPr>
+        <p:txBody>
+          <a:bodyPr wrap="square">
+            <a:spAutoFit/>
+          </a:bodyPr>
+          <a:lstStyle/>
+          <a:p>
+            <a:pPr algn="ctr"/>
+            <a:r>
+              <a:rPr sz="2000" b="0" i="0">
+                <a:solidFill>
+                  <a:srgbClr val="828282"/>
+                </a:solidFill>
+                <a:latin typeface="Arial"/>
+              </a:rPr>
+              <a:t>おお！救い主を礼拝しに来よ！</a:t>
+            </a:r>
+          </a:p>
+        </p:txBody>
+      </p:sp>
     </p:spTree>
   </p:cSld>
   <p:clrMapOvr>
@@ -4435,6 +4645,41 @@
           </a:p>
         </p:txBody>
       </p:sp>
+      <p:sp>
+        <p:nvSpPr>
+          <p:cNvPr id="5" name="TextBox 4"/>
+          <p:cNvSpPr txBox="1"/>
+          <p:nvPr/>
+        </p:nvSpPr>
+        <p:spPr>
+          <a:xfrm>
+            <a:off x="640080" y="4494276"/>
+            <a:ext cx="10911535" cy="310896"/>
+          </a:xfrm>
+          <a:prstGeom prst="rect">
+            <a:avLst/>
+          </a:prstGeom>
+          <a:noFill/>
+        </p:spPr>
+        <p:txBody>
+          <a:bodyPr wrap="square">
+            <a:spAutoFit/>
+          </a:bodyPr>
+          <a:lstStyle/>
+          <a:p>
+            <a:pPr algn="ctr"/>
+            <a:r>
+              <a:rPr sz="2000" b="0" i="0">
+                <a:solidFill>
+                  <a:srgbClr val="828282"/>
+                </a:solidFill>
+                <a:latin typeface="Arial"/>
+              </a:rPr>
+              <a:t>おお！救い主を礼拝しに来よ！</a:t>
+            </a:r>
+          </a:p>
+        </p:txBody>
+      </p:sp>
     </p:spTree>
   </p:cSld>
   <p:clrMapOvr>
@@ -4531,6 +4776,76 @@
           </a:p>
         </p:txBody>
       </p:sp>
+      <p:sp>
+        <p:nvSpPr>
+          <p:cNvPr id="4" name="TextBox 3"/>
+          <p:cNvSpPr txBox="1"/>
+          <p:nvPr/>
+        </p:nvSpPr>
+        <p:spPr>
+          <a:xfrm>
+            <a:off x="640080" y="4128516"/>
+            <a:ext cx="10911535" cy="310896"/>
+          </a:xfrm>
+          <a:prstGeom prst="rect">
+            <a:avLst/>
+          </a:prstGeom>
+          <a:noFill/>
+        </p:spPr>
+        <p:txBody>
+          <a:bodyPr wrap="square">
+            <a:spAutoFit/>
+          </a:bodyPr>
+          <a:lstStyle/>
+          <a:p>
+            <a:pPr algn="ctr"/>
+            <a:r>
+              <a:rPr sz="2000" b="0" i="0">
+                <a:solidFill>
+                  <a:srgbClr val="828282"/>
+                </a:solidFill>
+                <a:latin typeface="Arial"/>
+              </a:rPr>
+              <a:t>へりくだった羊飼いたちは羊の群れを離れ</a:t>
+            </a:r>
+          </a:p>
+        </p:txBody>
+      </p:sp>
+      <p:sp>
+        <p:nvSpPr>
+          <p:cNvPr id="5" name="TextBox 4"/>
+          <p:cNvSpPr txBox="1"/>
+          <p:nvPr/>
+        </p:nvSpPr>
+        <p:spPr>
+          <a:xfrm>
+            <a:off x="640080" y="4494276"/>
+            <a:ext cx="10911535" cy="310896"/>
+          </a:xfrm>
+          <a:prstGeom prst="rect">
+            <a:avLst/>
+          </a:prstGeom>
+          <a:noFill/>
+        </p:spPr>
+        <p:txBody>
+          <a:bodyPr wrap="square">
+            <a:spAutoFit/>
+          </a:bodyPr>
+          <a:lstStyle/>
+          <a:p>
+            <a:pPr algn="ctr"/>
+            <a:r>
+              <a:rPr sz="2000" b="0" i="0">
+                <a:solidFill>
+                  <a:srgbClr val="828282"/>
+                </a:solidFill>
+                <a:latin typeface="Arial"/>
+              </a:rPr>
+              <a:t>喜びに満ちて天の王のもとへ急ぎ行く。</a:t>
+            </a:r>
+          </a:p>
+        </p:txBody>
+      </p:sp>
     </p:spTree>
   </p:cSld>
   <p:clrMapOvr>
@@ -4592,6 +4907,41 @@
           </a:p>
         </p:txBody>
       </p:sp>
+      <p:sp>
+        <p:nvSpPr>
+          <p:cNvPr id="3" name="TextBox 2"/>
+          <p:cNvSpPr txBox="1"/>
+          <p:nvPr/>
+        </p:nvSpPr>
+        <p:spPr>
+          <a:xfrm>
+            <a:off x="640080" y="3845052"/>
+            <a:ext cx="10911535" cy="310896"/>
+          </a:xfrm>
+          <a:prstGeom prst="rect">
+            <a:avLst/>
+          </a:prstGeom>
+          <a:noFill/>
+        </p:spPr>
+        <p:txBody>
+          <a:bodyPr wrap="square">
+            <a:spAutoFit/>
+          </a:bodyPr>
+          <a:lstStyle/>
+          <a:p>
+            <a:pPr algn="ctr"/>
+            <a:r>
+              <a:rPr sz="2000" b="0" i="0">
+                <a:solidFill>
+                  <a:srgbClr val="828282"/>
+                </a:solidFill>
+                <a:latin typeface="Arial"/>
+              </a:rPr>
+              <a:t>私たちも同じく、喜びに満たされて。</a:t>
+            </a:r>
+          </a:p>
+        </p:txBody>
+      </p:sp>
     </p:spTree>
   </p:cSld>
   <p:clrMapOvr>
@@ -4684,6 +5034,76 @@
                 <a:latin typeface="Arial"/>
               </a:rPr>
               <a:t>Oh! Vinde adoremos o Salvador!</a:t>
+            </a:r>
+          </a:p>
+        </p:txBody>
+      </p:sp>
+      <p:sp>
+        <p:nvSpPr>
+          <p:cNvPr id="4" name="TextBox 3"/>
+          <p:cNvSpPr txBox="1"/>
+          <p:nvPr/>
+        </p:nvSpPr>
+        <p:spPr>
+          <a:xfrm>
+            <a:off x="640080" y="4128516"/>
+            <a:ext cx="10911535" cy="310896"/>
+          </a:xfrm>
+          <a:prstGeom prst="rect">
+            <a:avLst/>
+          </a:prstGeom>
+          <a:noFill/>
+        </p:spPr>
+        <p:txBody>
+          <a:bodyPr wrap="square">
+            <a:spAutoFit/>
+          </a:bodyPr>
+          <a:lstStyle/>
+          <a:p>
+            <a:pPr algn="ctr"/>
+            <a:r>
+              <a:rPr sz="2000" b="0" i="0">
+                <a:solidFill>
+                  <a:srgbClr val="828282"/>
+                </a:solidFill>
+                <a:latin typeface="Arial"/>
+              </a:rPr>
+              <a:t>おお！礼拝しに来よ、</a:t>
+            </a:r>
+          </a:p>
+        </p:txBody>
+      </p:sp>
+      <p:sp>
+        <p:nvSpPr>
+          <p:cNvPr id="5" name="TextBox 4"/>
+          <p:cNvSpPr txBox="1"/>
+          <p:nvPr/>
+        </p:nvSpPr>
+        <p:spPr>
+          <a:xfrm>
+            <a:off x="640080" y="4494276"/>
+            <a:ext cx="10911535" cy="310896"/>
+          </a:xfrm>
+          <a:prstGeom prst="rect">
+            <a:avLst/>
+          </a:prstGeom>
+          <a:noFill/>
+        </p:spPr>
+        <p:txBody>
+          <a:bodyPr wrap="square">
+            <a:spAutoFit/>
+          </a:bodyPr>
+          <a:lstStyle/>
+          <a:p>
+            <a:pPr algn="ctr"/>
+            <a:r>
+              <a:rPr sz="2000" b="0" i="0">
+                <a:solidFill>
+                  <a:srgbClr val="828282"/>
+                </a:solidFill>
+                <a:latin typeface="Arial"/>
+              </a:rPr>
+              <a:t>おお！救い主を礼拝しに来よ！</a:t>
             </a:r>
           </a:p>
         </p:txBody>
